--- a/docs/thesis/答辩演示.pptx
+++ b/docs/thesis/答辩演示.pptx
@@ -19,6 +19,7 @@
     <p:sldId id="267" r:id="rId18"/>
     <p:sldId id="268" r:id="rId19"/>
     <p:sldId id="269" r:id="rId20"/>
+    <p:sldId id="270" r:id="rId21"/>
   </p:sldIdLst>
   <p:sldSz cx="12191695" cy="6858000" type="screen4x3"/>
   <p:notesSz cx="6858000" cy="9144000"/>
@@ -3271,7 +3272,7 @@
               </a:defRPr>
             </a:pPr>
             <a:r>
-              <a:t>九、并发争抢实验</a:t>
+              <a:t>九、验证体系：五层自动化</a:t>
             </a:r>
           </a:p>
         </p:txBody>
@@ -3309,7 +3310,7 @@
               </a:defRPr>
             </a:pPr>
             <a:r>
-              <a:t>▪ 1/5/10/20 并发 × 20 轮 = 720 次争抢</a:t>
+              <a:t>▪ 单元测试 24 个（纯函数/不变量/业务直调/限流纯函数）</a:t>
             </a:r>
           </a:p>
           <a:p>
@@ -3324,7 +3325,7 @@
               </a:defRPr>
             </a:pPr>
             <a:r>
-              <a:t>▪ 每轮成功预约数 = 数据库占用数 = 1，零超卖</a:t>
+              <a:t>▪ 集成实验 42 项断言组（独立 Python 客户端驱动真实进程）</a:t>
             </a:r>
           </a:p>
           <a:p>
@@ -3339,7 +3340,7 @@
               </a:defRPr>
             </a:pPr>
             <a:r>
-              <a:t>▪ 其余请求全部收到明确 409，无忙碌失败</a:t>
+              <a:t>▪ 故障注入三类各 10 轮共 30 次：提交前 86 / 提交后 87 / 扫描中途 88，全部正确</a:t>
             </a:r>
           </a:p>
           <a:p>
@@ -3354,7 +3355,37 @@
               </a:defRPr>
             </a:pPr>
             <a:r>
-              <a:t>▪ 容量制下并发正确性由事务协议完全保证</a:t>
+              <a:t>▪ 模糊 240 次恶意输入零崩溃；浸泡 34970 请求零错误</a:t>
+            </a:r>
+          </a:p>
+          <a:p>
+            <a:pPr>
+              <a:spcAft>
+                <a:spcPts val="1000"/>
+              </a:spcAft>
+              <a:defRPr sz="2400">
+                <a:solidFill>
+                  <a:srgbClr val="18322D"/>
+                </a:solidFill>
+              </a:defRPr>
+            </a:pPr>
+            <a:r>
+              <a:t>▪ CI 三通道门禁：构建与测试 / 静态分析 / AddressSanitizer 内存安全（llvm-mingw）</a:t>
+            </a:r>
+          </a:p>
+          <a:p>
+            <a:pPr>
+              <a:spcAft>
+                <a:spcPts val="1000"/>
+              </a:spcAft>
+              <a:defRPr sz="2400">
+                <a:solidFill>
+                  <a:srgbClr val="18322D"/>
+                </a:solidFill>
+              </a:defRPr>
+            </a:pPr>
+            <a:r>
+              <a:t>▪ 计时旁路实验：登录有效/无效账号响应时间比 1.07，无账号枚举侧信道</a:t>
             </a:r>
           </a:p>
         </p:txBody>
@@ -3424,7 +3455,7 @@
               </a:defRPr>
             </a:pPr>
             <a:r>
-              <a:t>十、性能优化实验</a:t>
+              <a:t>十、并发争抢实验</a:t>
             </a:r>
           </a:p>
         </p:txBody>
@@ -3462,7 +3493,7 @@
               </a:defRPr>
             </a:pPr>
             <a:r>
-              <a:t>▪ 优化点：每线程连接复用 + 预编译语句 LRU 缓存</a:t>
+              <a:t>▪ 1/5/10/20 并发 × 20 轮 = 720 次争抢</a:t>
             </a:r>
           </a:p>
           <a:p>
@@ -3477,7 +3508,7 @@
               </a:defRPr>
             </a:pPr>
             <a:r>
-              <a:t>▪ 读路径：20 并发吞吐 451 → 3155 rps（+599%）</a:t>
+              <a:t>▪ 每轮成功预约数 = 数据库占用数 = 1，零超卖</a:t>
             </a:r>
           </a:p>
           <a:p>
@@ -3492,7 +3523,7 @@
               </a:defRPr>
             </a:pPr>
             <a:r>
-              <a:t>▪ 读路径 p50：41.71ms → 5.73ms（-86%）</a:t>
+              <a:t>▪ 其余请求全部收到明确 409，无忙碌失败</a:t>
             </a:r>
           </a:p>
           <a:p>
@@ -3507,22 +3538,7 @@
               </a:defRPr>
             </a:pPr>
             <a:r>
-              <a:t>▪ 写路径受写锁约束：+10%~+100%，符合预期</a:t>
-            </a:r>
-          </a:p>
-          <a:p>
-            <a:pPr>
-              <a:spcAft>
-                <a:spcPts val="1000"/>
-              </a:spcAft>
-              <a:defRPr sz="2400">
-                <a:solidFill>
-                  <a:srgbClr val="18322D"/>
-                </a:solidFill>
-              </a:defRPr>
-            </a:pPr>
-            <a:r>
-              <a:t>▪ 方法：同机同参前后对比，数据与脚本全部归档</a:t>
+              <a:t>▪ 容量制下并发正确性由事务协议完全保证</a:t>
             </a:r>
           </a:p>
         </p:txBody>
@@ -3592,7 +3608,7 @@
               </a:defRPr>
             </a:pPr>
             <a:r>
-              <a:t>十一、覆盖率与稳健性</a:t>
+              <a:t>十一、性能优化实验</a:t>
             </a:r>
           </a:p>
         </p:txBody>
@@ -3630,7 +3646,7 @@
               </a:defRPr>
             </a:pPr>
             <a:r>
-              <a:t>▪ gcov 行覆盖率：全模块 84.6% ~ 98%</a:t>
+              <a:t>▪ 优化点：每线程连接复用 + 预编译语句 LRU 缓存</a:t>
             </a:r>
           </a:p>
           <a:p>
@@ -3645,7 +3661,7 @@
               </a:defRPr>
             </a:pPr>
             <a:r>
-              <a:t>▪ 模糊实验 240 次恶意输入：零崩溃、零 5xx</a:t>
+              <a:t>▪ 读路径：20 并发吞吐 451 → 3155 rps（+599%）</a:t>
             </a:r>
           </a:p>
           <a:p>
@@ -3660,7 +3676,7 @@
               </a:defRPr>
             </a:pPr>
             <a:r>
-              <a:t>▪ 浸泡 34970 请求：工作集 +3MB、句柄 +44，无泄漏</a:t>
+              <a:t>▪ 读路径 p50：41.71ms → 5.73ms（-86%）</a:t>
             </a:r>
           </a:p>
           <a:p>
@@ -3675,7 +3691,22 @@
               </a:defRPr>
             </a:pPr>
             <a:r>
-              <a:t>▪ 五个真实缺陷由测试先行暴露并回归固化</a:t>
+              <a:t>▪ 写路径受写锁约束：+10%~+100%，符合预期</a:t>
+            </a:r>
+          </a:p>
+          <a:p>
+            <a:pPr>
+              <a:spcAft>
+                <a:spcPts val="1000"/>
+              </a:spcAft>
+              <a:defRPr sz="2400">
+                <a:solidFill>
+                  <a:srgbClr val="18322D"/>
+                </a:solidFill>
+              </a:defRPr>
+            </a:pPr>
+            <a:r>
+              <a:t>▪ 方法：同机同参前后对比，数据与脚本全部归档</a:t>
             </a:r>
           </a:p>
         </p:txBody>
@@ -3745,7 +3776,7 @@
               </a:defRPr>
             </a:pPr>
             <a:r>
-              <a:t>十二、总结与展望</a:t>
+              <a:t>十二、覆盖率与稳健性</a:t>
             </a:r>
           </a:p>
         </p:txBody>
@@ -3783,7 +3814,7 @@
               </a:defRPr>
             </a:pPr>
             <a:r>
-              <a:t>▪ 结论：C + 轻组件 + 事务纪律 + 自动化实验 = 可论证的可靠性</a:t>
+              <a:t>▪ gcov 行覆盖率：全模块 84.6% ~ 98%</a:t>
             </a:r>
           </a:p>
           <a:p>
@@ -3798,7 +3829,7 @@
               </a:defRPr>
             </a:pPr>
             <a:r>
-              <a:t>▪ 不足：单机回环、无 TLS、写并发受单写者限制</a:t>
+              <a:t>▪ 模糊实验 240 次恶意输入：零崩溃、零 5xx</a:t>
             </a:r>
           </a:p>
           <a:p>
@@ -3813,7 +3844,22 @@
               </a:defRPr>
             </a:pPr>
             <a:r>
-              <a:t>▪ 展望：TLS、门禁对接、多实例、机时分析</a:t>
+              <a:t>▪ 浸泡 34970 请求：工作集 +3MB、句柄 +44，无泄漏</a:t>
+            </a:r>
+          </a:p>
+          <a:p>
+            <a:pPr>
+              <a:spcAft>
+                <a:spcPts val="1000"/>
+              </a:spcAft>
+              <a:defRPr sz="2400">
+                <a:solidFill>
+                  <a:srgbClr val="18322D"/>
+                </a:solidFill>
+              </a:defRPr>
+            </a:pPr>
+            <a:r>
+              <a:t>▪ 七个真实缺陷由测试先行暴露并回归固化</a:t>
             </a:r>
           </a:p>
         </p:txBody>
@@ -3883,6 +3929,159 @@
               </a:defRPr>
             </a:pPr>
             <a:r>
+              <a:t>十三、总结与展望</a:t>
+            </a:r>
+          </a:p>
+        </p:txBody>
+      </p:sp>
+      <p:sp>
+        <p:nvSpPr>
+          <p:cNvPr id="3" name="TextBox 2"/>
+          <p:cNvSpPr txBox="1"/>
+          <p:nvPr/>
+        </p:nvSpPr>
+        <p:spPr>
+          <a:xfrm>
+            <a:off x="822960" y="1188720"/>
+            <a:ext cx="10515600" cy="5120640"/>
+          </a:xfrm>
+          <a:prstGeom prst="rect">
+            <a:avLst/>
+          </a:prstGeom>
+          <a:noFill/>
+        </p:spPr>
+        <p:txBody>
+          <a:bodyPr wrap="square">
+            <a:spAutoFit/>
+          </a:bodyPr>
+          <a:lstStyle/>
+          <a:p>
+            <a:pPr>
+              <a:spcAft>
+                <a:spcPts val="1000"/>
+              </a:spcAft>
+              <a:defRPr sz="2400">
+                <a:solidFill>
+                  <a:srgbClr val="18322D"/>
+                </a:solidFill>
+              </a:defRPr>
+            </a:pPr>
+            <a:r>
+              <a:t>▪ 结论：C + 轻组件 + 事务纪律 + 自动化实验 = 可论证的可靠性</a:t>
+            </a:r>
+          </a:p>
+          <a:p>
+            <a:pPr>
+              <a:spcAft>
+                <a:spcPts val="1000"/>
+              </a:spcAft>
+              <a:defRPr sz="2400">
+                <a:solidFill>
+                  <a:srgbClr val="18322D"/>
+                </a:solidFill>
+              </a:defRPr>
+            </a:pPr>
+            <a:r>
+              <a:t>▪ 业务闭环延伸至运营：提醒、备份轮转、归档、爽约信用、重叠检测</a:t>
+            </a:r>
+          </a:p>
+          <a:p>
+            <a:pPr>
+              <a:spcAft>
+                <a:spcPts val="1000"/>
+              </a:spcAft>
+              <a:defRPr sz="2400">
+                <a:solidFill>
+                  <a:srgbClr val="18322D"/>
+                </a:solidFill>
+              </a:defRPr>
+            </a:pPr>
+            <a:r>
+              <a:t>▪ 不足：单机回环、无 TLS、写并发受单写者限制</a:t>
+            </a:r>
+          </a:p>
+          <a:p>
+            <a:pPr>
+              <a:spcAft>
+                <a:spcPts val="1000"/>
+              </a:spcAft>
+              <a:defRPr sz="2400">
+                <a:solidFill>
+                  <a:srgbClr val="18322D"/>
+                </a:solidFill>
+              </a:defRPr>
+            </a:pPr>
+            <a:r>
+              <a:t>▪ 展望：TLS、门禁对接、多实例、机时分析、推送渠道</a:t>
+            </a:r>
+          </a:p>
+        </p:txBody>
+      </p:sp>
+    </p:spTree>
+  </p:cSld>
+  <p:clrMapOvr>
+    <a:masterClrMapping/>
+  </p:clrMapOvr>
+</p:sld>
+</file>
+
+<file path=ppt/slides/slide15.xml><?xml version="1.0" encoding="utf-8"?>
+<p:sld xmlns:a="http://schemas.openxmlformats.org/drawingml/2006/main" xmlns:p="http://schemas.openxmlformats.org/presentationml/2006/main" xmlns:r="http://schemas.openxmlformats.org/officeDocument/2006/relationships">
+  <p:cSld>
+    <p:spTree>
+      <p:nvGrpSpPr>
+        <p:cNvPr id="1" name=""/>
+        <p:cNvGrpSpPr/>
+        <p:nvPr/>
+      </p:nvGrpSpPr>
+      <p:grpSpPr/>
+      <p:sp>
+        <p:nvSpPr>
+          <p:cNvPr id="2" name="Rectangle 1"/>
+          <p:cNvSpPr/>
+          <p:nvPr/>
+        </p:nvSpPr>
+        <p:spPr>
+          <a:xfrm>
+            <a:off x="0" y="0"/>
+            <a:ext cx="12191695" cy="822960"/>
+          </a:xfrm>
+          <a:prstGeom prst="rect">
+            <a:avLst/>
+          </a:prstGeom>
+          <a:solidFill>
+            <a:srgbClr val="176D58"/>
+          </a:solidFill>
+          <a:ln>
+            <a:noFill/>
+          </a:ln>
+        </p:spPr>
+        <p:style>
+          <a:lnRef idx="1">
+            <a:schemeClr val="accent1"/>
+          </a:lnRef>
+          <a:fillRef idx="3">
+            <a:schemeClr val="accent1"/>
+          </a:fillRef>
+          <a:effectRef idx="2">
+            <a:schemeClr val="accent1"/>
+          </a:effectRef>
+          <a:fontRef idx="minor">
+            <a:schemeClr val="lt1"/>
+          </a:fontRef>
+        </p:style>
+        <p:txBody>
+          <a:bodyPr rtlCol="0" anchor="ctr"/>
+          <a:lstStyle/>
+          <a:p>
+            <a:pPr>
+              <a:defRPr sz="2800" b="1">
+                <a:solidFill>
+                  <a:srgbClr val="FFFFFF"/>
+                </a:solidFill>
+              </a:defRPr>
+            </a:pPr>
+            <a:r>
               <a:t>恳请各位老师批评指正</a:t>
             </a:r>
           </a:p>
@@ -4203,7 +4402,7 @@
               </a:defRPr>
             </a:pPr>
             <a:r>
-              <a:t>五层架构：浏览器 → CivetWeb 接入 → 单写者事务业务层 → db.c 数据访问 → SQLite。横切：限流、指标、日志。</a:t>
+              <a:t>五层架构：浏览器 → CivetWeb 接入 → 单写者事务业务层 → db.c 数据访问 → SQLite。横切：限流、指标、日志、后台任务（提醒/备份/归档）。</a:t>
             </a:r>
           </a:p>
         </p:txBody>
@@ -4273,7 +4472,7 @@
               </a:defRPr>
             </a:pPr>
             <a:r>
-              <a:t>三、需求与业务规则</a:t>
+              <a:t>三、需求与业务规则（BR1–BR11）</a:t>
             </a:r>
           </a:p>
         </p:txBody>
@@ -4371,7 +4570,22 @@
               </a:defRPr>
             </a:pPr>
             <a:r>
-              <a:t>▪ 账号自助：改密踢除其他会话、在线会话下线</a:t>
+              <a:t>▪ 爽约信用：近 7 天两次爽约受限拒约；时间重叠检测</a:t>
+            </a:r>
+          </a:p>
+          <a:p>
+            <a:pPr>
+              <a:spcAft>
+                <a:spcPts val="1000"/>
+              </a:spcAft>
+              <a:defRPr sz="2400">
+                <a:solidFill>
+                  <a:srgbClr val="18322D"/>
+                </a:solidFill>
+              </a:defRPr>
+            </a:pPr>
+            <a:r>
+              <a:t>▪ 管理端：独立控制台——场次调整、用户管理、通知发布、运行日志</a:t>
             </a:r>
           </a:p>
         </p:txBody>
@@ -4441,7 +4655,7 @@
               </a:defRPr>
             </a:pPr>
             <a:r>
-              <a:t>四、数据模型（schema v3）</a:t>
+              <a:t>四、数据模型（schema v2→v4）</a:t>
             </a:r>
           </a:p>
         </p:txBody>
@@ -4500,7 +4714,7 @@
               </a:defRPr>
             </a:pPr>
             <a:r>
-              <a:t>9 张表；v2 追加签到/取消原因/通知；v3 场次加 capacity、退役唯一索引。幂等迁移，旧库实测升级。</a:t>
+              <a:t>9 张表；v2 签到/取消原因/通知表；v3 容量制、退役唯一索引；v4 提醒防重加列 + CHECK 约束重建（建新表—拷贝—改名）。全部幂等迁移，旧库实测升级。</a:t>
             </a:r>
           </a:p>
         </p:txBody>
@@ -4981,21 +5195,45 @@
               </a:defRPr>
             </a:pPr>
             <a:r>
-              <a:t>八、验证体系：五层自动化</a:t>
-            </a:r>
-          </a:p>
-        </p:txBody>
-      </p:sp>
-      <p:sp>
-        <p:nvSpPr>
-          <p:cNvPr id="3" name="TextBox 2"/>
+              <a:t>八、管理控制台与运营能力</a:t>
+            </a:r>
+          </a:p>
+        </p:txBody>
+      </p:sp>
+      <p:pic>
+        <p:nvPicPr>
+          <p:cNvPr id="3" name="Picture 2" descr="fig5-1-admin-overview.png"/>
+          <p:cNvPicPr>
+            <a:picLocks noChangeAspect="1"/>
+          </p:cNvPicPr>
+          <p:nvPr/>
+        </p:nvPicPr>
+        <p:blipFill>
+          <a:blip r:embed="rId2"/>
+          <a:stretch>
+            <a:fillRect/>
+          </a:stretch>
+        </p:blipFill>
+        <p:spPr>
+          <a:xfrm>
+            <a:off x="731520" y="1097280"/>
+            <a:ext cx="8412480" cy="5257800"/>
+          </a:xfrm>
+          <a:prstGeom prst="rect">
+            <a:avLst/>
+          </a:prstGeom>
+        </p:spPr>
+      </p:pic>
+      <p:sp>
+        <p:nvSpPr>
+          <p:cNvPr id="4" name="TextBox 3"/>
           <p:cNvSpPr txBox="1"/>
           <p:nvPr/>
         </p:nvSpPr>
         <p:spPr>
           <a:xfrm>
-            <a:off x="822960" y="1188720"/>
-            <a:ext cx="10515600" cy="5120640"/>
+            <a:off x="9326880" y="1280160"/>
+            <a:ext cx="2560320" cy="5029200"/>
           </a:xfrm>
           <a:prstGeom prst="rect">
             <a:avLst/>
@@ -5009,77 +5247,14 @@
           <a:lstStyle/>
           <a:p>
             <a:pPr>
-              <a:spcAft>
-                <a:spcPts val="1000"/>
-              </a:spcAft>
-              <a:defRPr sz="2400">
+              <a:defRPr sz="1400">
                 <a:solidFill>
                   <a:srgbClr val="18322D"/>
                 </a:solidFill>
               </a:defRPr>
             </a:pPr>
             <a:r>
-              <a:t>▪ 单元测试 20 个（纯函数/不变量/业务直调/限流纯函数）</a:t>
-            </a:r>
-          </a:p>
-          <a:p>
-            <a:pPr>
-              <a:spcAft>
-                <a:spcPts val="1000"/>
-              </a:spcAft>
-              <a:defRPr sz="2400">
-                <a:solidFill>
-                  <a:srgbClr val="18322D"/>
-                </a:solidFill>
-              </a:defRPr>
-            </a:pPr>
-            <a:r>
-              <a:t>▪ 集成实验 31 项断言组（独立 Python 客户端驱动真实进程）</a:t>
-            </a:r>
-          </a:p>
-          <a:p>
-            <a:pPr>
-              <a:spcAft>
-                <a:spcPts val="1000"/>
-              </a:spcAft>
-              <a:defRPr sz="2400">
-                <a:solidFill>
-                  <a:srgbClr val="18322D"/>
-                </a:solidFill>
-              </a:defRPr>
-            </a:pPr>
-            <a:r>
-              <a:t>▪ 故障注入三类各 10 轮：提交前 86 / 提交后 87 / 扫描中途 88</a:t>
-            </a:r>
-          </a:p>
-          <a:p>
-            <a:pPr>
-              <a:spcAft>
-                <a:spcPts val="1000"/>
-              </a:spcAft>
-              <a:defRPr sz="2400">
-                <a:solidFill>
-                  <a:srgbClr val="18322D"/>
-                </a:solidFill>
-              </a:defRPr>
-            </a:pPr>
-            <a:r>
-              <a:t>▪ 模糊 240 次恶意输入零崩溃；浸泡 34970 请求零错误</a:t>
-            </a:r>
-          </a:p>
-          <a:p>
-            <a:pPr>
-              <a:spcAft>
-                <a:spcPts val="1000"/>
-              </a:spcAft>
-              <a:defRPr sz="2400">
-                <a:solidFill>
-                  <a:srgbClr val="18322D"/>
-                </a:solidFill>
-              </a:defRPr>
-            </a:pPr>
-            <a:r>
-              <a:t>▪ 静态分析零告警 + 加固构建 + CI 三 job（含 MSYS2 ASan 通道）</a:t>
+              <a:t>独立控制台十页签：场次开始前调整、用户管理（近 7 天爽约列与「受限中」标记）、通知发布、运行日志筛选；统计图为纯 DOM 生成的 SVG，零依赖。运营：场次开始提醒（reminded_at 防重）、自动备份轮转、30 天历史归档、--demo-days 演示数据。</a:t>
             </a:r>
           </a:p>
         </p:txBody>

--- a/docs/thesis/答辩演示.pptx
+++ b/docs/thesis/答辩演示.pptx
@@ -4365,7 +4365,7 @@
         <p:spPr>
           <a:xfrm>
             <a:off x="731520" y="1097280"/>
-            <a:ext cx="8412480" cy="5507794"/>
+            <a:ext cx="8412480" cy="6073916"/>
           </a:xfrm>
           <a:prstGeom prst="rect">
             <a:avLst/>
@@ -4677,7 +4677,7 @@
         <p:spPr>
           <a:xfrm>
             <a:off x="731520" y="1097280"/>
-            <a:ext cx="8412480" cy="5389772"/>
+            <a:ext cx="8412480" cy="5421092"/>
           </a:xfrm>
           <a:prstGeom prst="rect">
             <a:avLst/>
@@ -4959,7 +4959,7 @@
         <p:spPr>
           <a:xfrm>
             <a:off x="731520" y="1097280"/>
-            <a:ext cx="8412480" cy="6554113"/>
+            <a:ext cx="8412480" cy="6648752"/>
           </a:xfrm>
           <a:prstGeom prst="rect">
             <a:avLst/>
@@ -5088,7 +5088,7 @@
         <p:spPr>
           <a:xfrm>
             <a:off x="731520" y="1097280"/>
-            <a:ext cx="8412480" cy="5105688"/>
+            <a:ext cx="8412480" cy="5016200"/>
           </a:xfrm>
           <a:prstGeom prst="rect">
             <a:avLst/>

--- a/docs/thesis/答辩演示.pptx
+++ b/docs/thesis/答辩演示.pptx
@@ -3149,7 +3149,7 @@
               </a:defRPr>
             </a:pPr>
             <a:r>
-              <a:t>基于 C 语言的实验室预约与候补系统</a:t>
+              <a:t>基于 C 语言的实验室资源管理与预约候补一体化系统</a:t>
             </a:r>
           </a:p>
         </p:txBody>

--- a/docs/thesis/答辩演示.pptx
+++ b/docs/thesis/答辩演示.pptx
@@ -3325,7 +3325,7 @@
               </a:defRPr>
             </a:pPr>
             <a:r>
-              <a:t>▪ 集成实验 42 项断言组（独立 Python 客户端驱动真实进程）</a:t>
+              <a:t>▪ 集成实验 44 项断言组（独立 Python 客户端驱动真实进程）</a:t>
             </a:r>
           </a:p>
           <a:p>
@@ -3982,7 +3982,7 @@
               </a:defRPr>
             </a:pPr>
             <a:r>
-              <a:t>▪ 业务闭环延伸至运营：提醒、备份轮转、归档、爽约信用、重叠检测</a:t>
+              <a:t>▪ 业务闭环延伸至资源管理一体化：资源清单、利用率统计、提醒、备份轮转、归档、爽约信用、重叠检测</a:t>
             </a:r>
           </a:p>
           <a:p>
@@ -4585,7 +4585,7 @@
               </a:defRPr>
             </a:pPr>
             <a:r>
-              <a:t>▪ 管理端：独立控制台——场次调整、用户管理、通知发布、运行日志</a:t>
+              <a:t>▪ 管理端：独立控制台——场次调整、用户管理、通知发布、资源清单、运行日志</a:t>
             </a:r>
           </a:p>
         </p:txBody>
@@ -4655,7 +4655,7 @@
               </a:defRPr>
             </a:pPr>
             <a:r>
-              <a:t>四、数据模型（schema v2→v4）</a:t>
+              <a:t>四、数据模型（schema v2→v5）</a:t>
             </a:r>
           </a:p>
         </p:txBody>
@@ -4714,7 +4714,7 @@
               </a:defRPr>
             </a:pPr>
             <a:r>
-              <a:t>9 张表；v2 签到/取消原因/通知表；v3 容量制、退役唯一索引；v4 提醒防重加列 + CHECK 约束重建（建新表—拷贝—改名）。全部幂等迁移，旧库实测升级。</a:t>
+              <a:t>10 张表；v2 签到/取消原因/通知表；v3 容量制；v4 提醒防重 + CHECK 重建；v5 资源表 assets（实验室内名唯一、三态）。全部幂等迁移，旧库实测。</a:t>
             </a:r>
           </a:p>
         </p:txBody>
@@ -5254,7 +5254,7 @@
               </a:defRPr>
             </a:pPr>
             <a:r>
-              <a:t>独立控制台十页签：场次开始前调整、用户管理（近 7 天爽约列与「受限中」标记）、通知发布、运行日志筛选；统计图为纯 DOM 生成的 SVG，零依赖。运营：场次开始提醒（reminded_at 防重）、自动备份轮转、30 天历史归档、--demo-days 演示数据。</a:t>
+              <a:t>独立控制台十一页签：场次开始前调整、用户管理（近 7 天爽约列与「受限中」标记）、资源管理（设备清单三态维护）、通知发布、运行日志筛选；统计页含利用率表与 SVG 图，零依赖。运营：开场提醒（防重）、备份轮转、30 天归档、--demo-days 演示数据。</a:t>
             </a:r>
           </a:p>
         </p:txBody>

--- a/docs/thesis/答辩演示.pptx
+++ b/docs/thesis/答辩演示.pptx
@@ -3325,7 +3325,7 @@
               </a:defRPr>
             </a:pPr>
             <a:r>
-              <a:t>▪ 集成实验 44 项断言组（独立 Python 客户端驱动真实进程）</a:t>
+              <a:t>▪ 集成实验 45 项断言组（独立 Python 客户端驱动真实进程）</a:t>
             </a:r>
           </a:p>
           <a:p>
@@ -4585,6 +4585,21 @@
               </a:defRPr>
             </a:pPr>
             <a:r>
+              <a:t>▪ 资源声明：预约时勾选所需设备，同时段配额事务内校验</a:t>
+            </a:r>
+          </a:p>
+          <a:p>
+            <a:pPr>
+              <a:spcAft>
+                <a:spcPts val="1000"/>
+              </a:spcAft>
+              <a:defRPr sz="2400">
+                <a:solidFill>
+                  <a:srgbClr val="18322D"/>
+                </a:solidFill>
+              </a:defRPr>
+            </a:pPr>
+            <a:r>
               <a:t>▪ 管理端：独立控制台——场次调整、用户管理、通知发布、资源清单、运行日志</a:t>
             </a:r>
           </a:p>
@@ -4655,7 +4670,7 @@
               </a:defRPr>
             </a:pPr>
             <a:r>
-              <a:t>四、数据模型（schema v2→v5）</a:t>
+              <a:t>四、数据模型（schema v2→v6）</a:t>
             </a:r>
           </a:p>
         </p:txBody>
@@ -4677,7 +4692,7 @@
         <p:spPr>
           <a:xfrm>
             <a:off x="731520" y="1097280"/>
-            <a:ext cx="8412480" cy="5421092"/>
+            <a:ext cx="8412480" cy="5765761"/>
           </a:xfrm>
           <a:prstGeom prst="rect">
             <a:avLst/>
@@ -4714,7 +4729,7 @@
               </a:defRPr>
             </a:pPr>
             <a:r>
-              <a:t>10 张表；v2 签到/取消原因/通知表；v3 容量制；v4 提醒防重 + CHECK 重建；v5 资源表 assets（实验室内名唯一、三态）。全部幂等迁移，旧库实测。</a:t>
+              <a:t>11 张表；v3 容量制；v4 提醒防重 + CHECK 重建；v5 资源表 assets；v6 资源声明表 asset_claims（预约×资源）。全部幂等迁移，旧库实测。</a:t>
             </a:r>
           </a:p>
         </p:txBody>
@@ -5254,7 +5269,7 @@
               </a:defRPr>
             </a:pPr>
             <a:r>
-              <a:t>独立控制台十一页签：场次开始前调整、用户管理（近 7 天爽约列与「受限中」标记）、资源管理（设备清单三态维护）、通知发布、运行日志筛选；统计页含利用率表与 SVG 图，零依赖。运营：开场提醒（防重）、备份轮转、30 天归档、--demo-days 演示数据。</a:t>
+              <a:t>独立控制台十一页签：场次调整、用户管理、资源管理（三态维护）、通知发布、运行日志；统计页含利用率表与 SVG 图。用户端预约卡可勾选资源声明，同时段配额事务内校验（BR12），取消自动释放。运营：提醒、备份轮转、归档、--demo-days。</a:t>
             </a:r>
           </a:p>
         </p:txBody>

--- a/docs/thesis/答辩演示.pptx
+++ b/docs/thesis/答辩演示.pptx
@@ -3325,7 +3325,7 @@
               </a:defRPr>
             </a:pPr>
             <a:r>
-              <a:t>▪ 集成实验 45 项断言组（独立 Python 客户端驱动真实进程）</a:t>
+              <a:t>▪ 集成实验 48 项断言组（独立 Python 客户端驱动真实进程）</a:t>
             </a:r>
           </a:p>
           <a:p>
@@ -3982,7 +3982,7 @@
               </a:defRPr>
             </a:pPr>
             <a:r>
-              <a:t>▪ 业务闭环延伸至资源管理一体化：资源清单、利用率统计、提醒、备份轮转、归档、爽约信用、重叠检测</a:t>
+              <a:t>▪ 一体化深化：资源声明配额、实机时利用率、周期性发布、每周配额、iCalendar 导出</a:t>
             </a:r>
           </a:p>
           <a:p>
@@ -4585,7 +4585,7 @@
               </a:defRPr>
             </a:pPr>
             <a:r>
-              <a:t>▪ 资源声明：预约时勾选所需设备，同时段配额事务内校验</a:t>
+              <a:t>▪ 资源声明：预约时勾选设备+同时段配额（BR12）；每周配额（BR13）</a:t>
             </a:r>
           </a:p>
           <a:p>

--- a/docs/thesis/答辩演示.pptx
+++ b/docs/thesis/答辩演示.pptx
@@ -3325,7 +3325,7 @@
               </a:defRPr>
             </a:pPr>
             <a:r>
-              <a:t>▪ 集成实验 48 项断言组（独立 Python 客户端驱动真实进程）</a:t>
+              <a:t>▪ 集成实验 50 项断言组（独立 Python 客户端驱动真实进程）</a:t>
             </a:r>
           </a:p>
           <a:p>
@@ -3982,7 +3982,7 @@
               </a:defRPr>
             </a:pPr>
             <a:r>
-              <a:t>▪ 一体化深化：资源声明配额、实机时利用率、周期性发布、每周配额、iCalendar 导出</a:t>
+              <a:t>▪ 一体化深化：资源声明配额、实机时利用率、周期发布、每周配额、日历导出、Prometheus 端点</a:t>
             </a:r>
           </a:p>
           <a:p>
@@ -4585,7 +4585,7 @@
               </a:defRPr>
             </a:pPr>
             <a:r>
-              <a:t>▪ 资源声明：预约时勾选设备+同时段配额（BR12）；每周配额（BR13）</a:t>
+              <a:t>▪ 资源声明配额（BR12）；每周配额（BR13）；预约提前量（BR14）</a:t>
             </a:r>
           </a:p>
           <a:p>

--- a/docs/thesis/答辩演示.pptx
+++ b/docs/thesis/答辩演示.pptx
@@ -3325,7 +3325,7 @@
               </a:defRPr>
             </a:pPr>
             <a:r>
-              <a:t>▪ 集成实验 50 项断言组（独立 Python 客户端驱动真实进程）</a:t>
+              <a:t>▪ 集成实验 51 项断言组（独立 Python 客户端驱动真实进程）</a:t>
             </a:r>
           </a:p>
           <a:p>
@@ -4585,7 +4585,7 @@
               </a:defRPr>
             </a:pPr>
             <a:r>
-              <a:t>▪ 资源声明配额（BR12）；每周配额（BR13）；预约提前量（BR14）</a:t>
+              <a:t>▪ 生命周期三件套：创建 / 改期（原子+补位联动）/ 取消；资源声明配额（BR12）；每周配额（BR13）；提前量（BR14）</a:t>
             </a:r>
           </a:p>
           <a:p>

--- a/docs/thesis/答辩演示.pptx
+++ b/docs/thesis/答辩演示.pptx
@@ -3325,7 +3325,7 @@
               </a:defRPr>
             </a:pPr>
             <a:r>
-              <a:t>▪ 集成实验 51 项断言组（独立 Python 客户端驱动真实进程）</a:t>
+              <a:t>▪ 集成实验 68 项断言组（T01–T67 + CLI 检查；含组合规则验证 T63–T67）</a:t>
             </a:r>
           </a:p>
           <a:p>
@@ -3385,7 +3385,7 @@
               </a:defRPr>
             </a:pPr>
             <a:r>
-              <a:t>▪ 计时旁路实验：登录有效/无效账号响应时间比 1.07，无账号枚举侧信道</a:t>
+              <a:t>▪ 计时旁路实验：登录有效/无效账号响应时间比 1.07，显著降低账号枚举可观测差异</a:t>
             </a:r>
           </a:p>
         </p:txBody>
@@ -3508,7 +3508,7 @@
               </a:defRPr>
             </a:pPr>
             <a:r>
-              <a:t>▪ 每轮成功预约数 = 数据库占用数 = 1，零超卖</a:t>
+              <a:t>▪ 每轮成功预约数 = 数据库占用数 = 1（实验样本内未出现超卖）</a:t>
             </a:r>
           </a:p>
           <a:p>
@@ -3538,7 +3538,7 @@
               </a:defRPr>
             </a:pPr>
             <a:r>
-              <a:t>▪ 容量制下并发正确性由事务协议完全保证</a:t>
+              <a:t>▪ 该实验条件下，事务协议足以替代唯一索引兜底</a:t>
             </a:r>
           </a:p>
         </p:txBody>
@@ -3844,7 +3844,7 @@
               </a:defRPr>
             </a:pPr>
             <a:r>
-              <a:t>▪ 浸泡 34970 请求：工作集 +3MB、句柄 +44，无泄漏</a:t>
+              <a:t>▪ 浸泡 34970 请求：工作集 +3MB、句柄 +44，浸泡窗口内未观察到持续增长</a:t>
             </a:r>
           </a:p>
           <a:p>
@@ -3982,7 +3982,7 @@
               </a:defRPr>
             </a:pPr>
             <a:r>
-              <a:t>▪ 一体化深化：资源声明配额、实机时利用率、周期发布、每周配额、日历导出、Prometheus 端点</a:t>
+              <a:t>▪ 一体化深化：资源声明配额、实机时利用率、周期发布、每周配额、日历导出、Prometheus 端点、审批流、候补策略、资格授权、信用账户</a:t>
             </a:r>
           </a:p>
           <a:p>
@@ -4600,7 +4600,52 @@
               </a:defRPr>
             </a:pPr>
             <a:r>
-              <a:t>▪ 管理端：独立控制台——场次调整、用户管理、通知发布、资源清单、运行日志</a:t>
+              <a:t>▪ 审批流：require_approval 实验室预约落 PENDING，批准时事务内重校容量（APPROVAL_CAPACITY）</a:t>
+            </a:r>
+          </a:p>
+          <a:p>
+            <a:pPr>
+              <a:spcAft>
+                <a:spcPts val="1000"/>
+              </a:spcAft>
+              <a:defRPr sz="2400">
+                <a:solidFill>
+                  <a:srgbClr val="18322D"/>
+                </a:solidFill>
+              </a:defRPr>
+            </a:pPr>
+            <a:r>
+              <a:t>▪ 候补策略：可执行 FIFO（BR19，暂跳冲突保留序号）与 strict 对照；HELD 限时保留（BR20，confirm 确认）</a:t>
+            </a:r>
+          </a:p>
+          <a:p>
+            <a:pPr>
+              <a:spcAft>
+                <a:spcPts val="1000"/>
+              </a:spcAft>
+              <a:defRPr sz="2400">
+                <a:solidFill>
+                  <a:srgbClr val="18322D"/>
+                </a:solidFill>
+              </a:defRPr>
+            </a:pPr>
+            <a:r>
+              <a:t>▪ 信用账户（BR16，+1 抢占补偿/周回补）与优先级抢占（BR15，仅未签到者）；维护工单（BR18）、时段窗（BR17）、资格授权（BR21）</a:t>
+            </a:r>
+          </a:p>
+          <a:p>
+            <a:pPr>
+              <a:spcAft>
+                <a:spcPts val="1000"/>
+              </a:spcAft>
+              <a:defRPr sz="2400">
+                <a:solidFill>
+                  <a:srgbClr val="18322D"/>
+                </a:solidFill>
+              </a:defRPr>
+            </a:pPr>
+            <a:r>
+              <a:t>▪ 管理端：独立控制台——场次调整、用户管理、通知发布、资源清单、运行日志；API 访问令牌自助管理</a:t>
             </a:r>
           </a:p>
         </p:txBody>
@@ -4670,7 +4715,7 @@
               </a:defRPr>
             </a:pPr>
             <a:r>
-              <a:t>四、数据模型（schema v2→v6）</a:t>
+              <a:t>四、数据模型（schema v2→v5）</a:t>
             </a:r>
           </a:p>
         </p:txBody>
@@ -4729,7 +4774,7 @@
               </a:defRPr>
             </a:pPr>
             <a:r>
-              <a:t>11 张表；v3 容量制；v4 提醒防重 + CHECK 重建；v5 资源表 assets；v6 资源声明表 asset_claims（预约×资源）。全部幂等迁移，旧库实测。</a:t>
+              <a:t>17 张表（核心 11 表 + r17-r24 扩展 6 表）；v3 容量制；v4 提醒防重 + CHECK 重建；v5 资源表 assets 及声明/时段窗/维护工单/资格/信用/令牌各表。全部幂等迁移，旧库实测。</a:t>
             </a:r>
           </a:p>
         </p:txBody>
@@ -4852,7 +4897,7 @@
               </a:defRPr>
             </a:pPr>
             <a:r>
-              <a:t>▪ 事务内校验容量不变量：已约数 ≤ capacity</a:t>
+              <a:t>▪ 事务内校验容量不变量：占容（CONFIRMED+HELD）≤ capacity</a:t>
             </a:r>
           </a:p>
           <a:p>
@@ -4882,7 +4927,7 @@
               </a:defRPr>
             </a:pPr>
             <a:r>
-              <a:t>▪ 实证：720 次并发争抢，每轮恰好 1 席，零超卖</a:t>
+              <a:t>▪ 实证：720 次并发争抢，每轮成功数与落库占用数恒为 1，实验条件下未出现超卖</a:t>
             </a:r>
           </a:p>
         </p:txBody>

--- a/docs/thesis/答辩演示.pptx
+++ b/docs/thesis/答辩演示.pptx
@@ -3325,7 +3325,7 @@
               </a:defRPr>
             </a:pPr>
             <a:r>
-              <a:t>▪ 集成实验 68 项断言组（T01–T67 + CLI 检查；含组合规则验证 T63–T67）</a:t>
+              <a:t>▪ 集成实验 70 项断言组（T01–T69 及 CLI 检查；组合验证 T63–T67、凭据生命周期 T68、约束感知建议 T69）</a:t>
             </a:r>
           </a:p>
           <a:p>
@@ -3982,7 +3982,7 @@
               </a:defRPr>
             </a:pPr>
             <a:r>
-              <a:t>▪ 一体化深化：资源声明配额、实机时利用率、周期发布、每周配额、日历导出、Prometheus 端点、审批流、候补策略、资格授权、信用账户</a:t>
+              <a:t>▪ 一体化深化：资源声明配额、实机时利用率、周期发布、每周配额、日历导出、Prometheus 端点、审批流、候补策略、资格授权、信用账户、约束感知建议</a:t>
             </a:r>
           </a:p>
           <a:p>
@@ -4365,7 +4365,7 @@
         <p:spPr>
           <a:xfrm>
             <a:off x="731520" y="1097280"/>
-            <a:ext cx="8412480" cy="6073916"/>
+            <a:ext cx="7472113" cy="5394960"/>
           </a:xfrm>
           <a:prstGeom prst="rect">
             <a:avLst/>
@@ -4472,7 +4472,7 @@
               </a:defRPr>
             </a:pPr>
             <a:r>
-              <a:t>三、需求与业务规则（BR1–BR11）</a:t>
+              <a:t>三、需求与业务规则（BR1–BR21）</a:t>
             </a:r>
           </a:p>
         </p:txBody>
@@ -4525,7 +4525,7 @@
               </a:defRPr>
             </a:pPr>
             <a:r>
-              <a:t>▪ FIFO 候补：满员排队，释放后同事务连续补位</a:t>
+              <a:t>▪ 候补：满员排队，释放后同事务连续补位；限时签到：超时爽约回收</a:t>
             </a:r>
           </a:p>
           <a:p>
@@ -4540,7 +4540,7 @@
               </a:defRPr>
             </a:pPr>
             <a:r>
-              <a:t>▪ 限时签到：超时爽约回收并自动补位，双向通知</a:t>
+              <a:t>▪ 幂等重试：每操作携带 UUID，同号重放返回原结果</a:t>
             </a:r>
           </a:p>
           <a:p>
@@ -4555,7 +4555,7 @@
               </a:defRPr>
             </a:pPr>
             <a:r>
-              <a:t>▪ 幂等重试：每操作携带 UUID，同号重放返回原结果</a:t>
+              <a:t>▪ 爽约信用受限；时间重叠检测；预约审批流（PENDING→批准重校容量）</a:t>
             </a:r>
           </a:p>
           <a:p>
@@ -4570,7 +4570,7 @@
               </a:defRPr>
             </a:pPr>
             <a:r>
-              <a:t>▪ 爽约信用：近 7 天两次爽约受限拒约；时间重叠检测</a:t>
+              <a:t>▪ 候补策略：可执行 FIFO（BR19，暂跳冲突保留序号）与 strict；HELD 限时保留（BR20，confirm 确认）</a:t>
             </a:r>
           </a:p>
           <a:p>
@@ -4585,7 +4585,7 @@
               </a:defRPr>
             </a:pPr>
             <a:r>
-              <a:t>▪ 生命周期三件套：创建 / 改期（原子+补位联动）/ 取消；资源声明配额（BR12）；每周配额（BR13）；提前量（BR14）</a:t>
+              <a:t>▪ 抢占（BR15，仅未签到者）× 信用账户（BR16，补偿/周回补）</a:t>
             </a:r>
           </a:p>
           <a:p>
@@ -4600,7 +4600,7 @@
               </a:defRPr>
             </a:pPr>
             <a:r>
-              <a:t>▪ 审批流：require_approval 实验室预约落 PENDING，批准时事务内重校容量（APPROVAL_CAPACITY）</a:t>
+              <a:t>▪ 资源域：声明配额（BR12）· 维护工单（BR18）· 时段窗（BR17）· 资格授权（BR21）；周配额（BR13）· 提前量（BR14）</a:t>
             </a:r>
           </a:p>
           <a:p>
@@ -4615,37 +4615,7 @@
               </a:defRPr>
             </a:pPr>
             <a:r>
-              <a:t>▪ 候补策略：可执行 FIFO（BR19，暂跳冲突保留序号）与 strict 对照；HELD 限时保留（BR20，confirm 确认）</a:t>
-            </a:r>
-          </a:p>
-          <a:p>
-            <a:pPr>
-              <a:spcAft>
-                <a:spcPts val="1000"/>
-              </a:spcAft>
-              <a:defRPr sz="2400">
-                <a:solidFill>
-                  <a:srgbClr val="18322D"/>
-                </a:solidFill>
-              </a:defRPr>
-            </a:pPr>
-            <a:r>
-              <a:t>▪ 信用账户（BR16，+1 抢占补偿/周回补）与优先级抢占（BR15，仅未签到者）；维护工单（BR18）、时段窗（BR17）、资格授权（BR21）</a:t>
-            </a:r>
-          </a:p>
-          <a:p>
-            <a:pPr>
-              <a:spcAft>
-                <a:spcPts val="1000"/>
-              </a:spcAft>
-              <a:defRPr sz="2400">
-                <a:solidFill>
-                  <a:srgbClr val="18322D"/>
-                </a:solidFill>
-              </a:defRPr>
-            </a:pPr>
-            <a:r>
-              <a:t>▪ 管理端：独立控制台——场次调整、用户管理、通知发布、资源清单、运行日志；API 访问令牌自助管理</a:t>
+              <a:t>▪ 管理端：独立控制台；API 访问令牌自助管理</a:t>
             </a:r>
           </a:p>
         </p:txBody>
@@ -4737,7 +4707,7 @@
         <p:spPr>
           <a:xfrm>
             <a:off x="731520" y="1097280"/>
-            <a:ext cx="8412480" cy="5765761"/>
+            <a:ext cx="7871465" cy="5394960"/>
           </a:xfrm>
           <a:prstGeom prst="rect">
             <a:avLst/>
@@ -5019,7 +4989,7 @@
         <p:spPr>
           <a:xfrm>
             <a:off x="731520" y="1097280"/>
-            <a:ext cx="8412480" cy="6648752"/>
+            <a:ext cx="6826091" cy="5394959"/>
           </a:xfrm>
           <a:prstGeom prst="rect">
             <a:avLst/>

--- a/docs/thesis/答辩演示.pptx
+++ b/docs/thesis/答辩演示.pptx
@@ -3661,7 +3661,7 @@
               </a:defRPr>
             </a:pPr>
             <a:r>
-              <a:t>▪ 读路径：20 并发吞吐 451 → 3155 rps（+599%）</a:t>
+              <a:t>▪ 读路径：20 并发吞吐 304 → 1948 rps（+541%）</a:t>
             </a:r>
           </a:p>
           <a:p>
@@ -3676,7 +3676,7 @@
               </a:defRPr>
             </a:pPr>
             <a:r>
-              <a:t>▪ 读路径 p50：41.71ms → 5.73ms（-86%）</a:t>
+              <a:t>▪ 读路径 p50：63.9ms → 8.2ms（-87%）</a:t>
             </a:r>
           </a:p>
           <a:p>
@@ -3691,7 +3691,7 @@
               </a:defRPr>
             </a:pPr>
             <a:r>
-              <a:t>▪ 写路径受写锁约束：+10%~+100%，符合预期</a:t>
+              <a:t>▪ 写路径受写锁约束：+2%~+63%，符合预期</a:t>
             </a:r>
           </a:p>
           <a:p>
@@ -3814,7 +3814,7 @@
               </a:defRPr>
             </a:pPr>
             <a:r>
-              <a:t>▪ gcov 行覆盖率：全模块 84.6% ~ 98%</a:t>
+              <a:t>▪ gcov 行覆盖率：全模块 83.5% ~ 98.1%</a:t>
             </a:r>
           </a:p>
           <a:p>

--- a/docs/thesis/答辩演示.pptx
+++ b/docs/thesis/答辩演示.pptx
@@ -3325,7 +3325,7 @@
               </a:defRPr>
             </a:pPr>
             <a:r>
-              <a:t>▪ 集成实验 70 项断言组（T01–T69 及 CLI 检查；组合验证 T63–T67、凭据生命周期 T68、约束感知建议 T69）</a:t>
+              <a:t>▪ 集成实验 74 项断言组（T01–T73 及 CLI 检查；组合验证 T63–T67、T68–T69、策略与治理 T70–T73）</a:t>
             </a:r>
           </a:p>
           <a:p>
@@ -3538,7 +3538,7 @@
               </a:defRPr>
             </a:pPr>
             <a:r>
-              <a:t>▪ 该实验条件下，事务协议足以替代唯一索引兜底</a:t>
+              <a:t>▪ 该实验条件下，事务协议足以替代唯一索引兜底；三策略矩阵：strict 队首冲突空置，executable/weighted 满额递补且 weighted 平均等待减半（7.2ks→3.6ks）</a:t>
             </a:r>
           </a:p>
         </p:txBody>
@@ -3982,7 +3982,7 @@
               </a:defRPr>
             </a:pPr>
             <a:r>
-              <a:t>▪ 一体化深化：资源声明配额、实机时利用率、周期发布、每周配额、日历导出、Prometheus 端点、审批流、候补策略、资格授权、信用账户、约束感知建议</a:t>
+              <a:t>▪ 一体化深化：资源声明配额、审批流、候补三档策略（含老化加权）、资格授权、信用账户、约束感知建议（含转正概率）、公平性审计（Jain 指数）、每日候补上限</a:t>
             </a:r>
           </a:p>
           <a:p>
@@ -4570,7 +4570,7 @@
               </a:defRPr>
             </a:pPr>
             <a:r>
-              <a:t>▪ 候补策略：可执行 FIFO（BR19，暂跳冲突保留序号）与 strict；HELD 限时保留（BR20，confirm 确认）</a:t>
+              <a:t>▪ 候补策略三档：可执行 FIFO（BR19 默认）/ strict / weighted 老化加权（1000·优先级+200·信用+60·log₂ 等待）；HELD 限时保留（BR20）</a:t>
             </a:r>
           </a:p>
           <a:p>

--- a/docs/thesis/答辩演示.pptx
+++ b/docs/thesis/答辩演示.pptx
@@ -3325,7 +3325,7 @@
               </a:defRPr>
             </a:pPr>
             <a:r>
-              <a:t>▪ 集成实验 74 项断言组（T01–T73 及 CLI 检查；组合验证 T63–T67、T68–T69、策略与治理 T70–T73）</a:t>
+              <a:t>▪ 集成实验 75 项断言组（T01–T74 及 CLI；组合验证 T63–T67、T68–T69、策略治理 T70–T73、差分属性 T74）</a:t>
             </a:r>
           </a:p>
           <a:p>
@@ -3814,7 +3814,7 @@
               </a:defRPr>
             </a:pPr>
             <a:r>
-              <a:t>▪ gcov 行覆盖率：全模块 83.5% ~ 98.1%</a:t>
+              <a:t>▪ gcov 行覆盖率：全模块 81.5% ~ 98.1%</a:t>
             </a:r>
           </a:p>
           <a:p>

--- a/docs/thesis/答辩演示.pptx
+++ b/docs/thesis/答辩演示.pptx
@@ -3310,7 +3310,7 @@
               </a:defRPr>
             </a:pPr>
             <a:r>
-              <a:t>▪ 单元测试 24 个（纯函数/不变量/业务直调/限流纯函数）</a:t>
+              <a:t>▪ 单元测试 25 个（纯函数/不变量/业务直调/限流纯函数/outbox 派发）</a:t>
             </a:r>
           </a:p>
           <a:p>
@@ -3325,7 +3325,7 @@
               </a:defRPr>
             </a:pPr>
             <a:r>
-              <a:t>▪ 集成实验 75 项断言组（T01–T74 及 CLI；组合验证 T63–T67、T68–T69、策略治理 T70–T73、差分属性 T74）</a:t>
+              <a:t>▪ 集成实验 79 项断言组（T01–T78 及 CLI；组合验证 T63–T67、T68–T69、策略治理 T70–T73、差分属性 T74、管理操作 T75–T78）</a:t>
             </a:r>
           </a:p>
           <a:p>
@@ -3355,7 +3355,7 @@
               </a:defRPr>
             </a:pPr>
             <a:r>
-              <a:t>▪ 模糊 240 次恶意输入零崩溃；浸泡 34970 请求零错误</a:t>
+              <a:t>▪ 模糊 240 次恶意输入零崩溃；浸泡 51,140 请求零错误</a:t>
             </a:r>
           </a:p>
           <a:p>
@@ -3844,7 +3844,7 @@
               </a:defRPr>
             </a:pPr>
             <a:r>
-              <a:t>▪ 浸泡 34970 请求：工作集 +3MB、句柄 +44，浸泡窗口内未观察到持续增长</a:t>
+              <a:t>▪ 浸泡 51,140 请求：工作集 +3MB、句柄 +44，浸泡窗口内未观察到持续增长</a:t>
             </a:r>
           </a:p>
           <a:p>
@@ -5284,7 +5284,7 @@
               </a:defRPr>
             </a:pPr>
             <a:r>
-              <a:t>独立控制台十一页签：场次调整、用户管理、资源管理（三态维护）、通知发布、运行日志；统计页含利用率表与 SVG 图。用户端预约卡可勾选资源声明，同时段配额事务内校验（BR12），取消自动释放。运营：提醒、备份轮转、归档、--demo-days。</a:t>
+              <a:t>独立控制台十二页签：场次调整、待审批专页（批量审批）、用户管理、资源管理（三态维护）、通知发布、运行日志；统计页含利用率表与 SVG 图；全员记录表内置强制取消/代签退。用户端预约卡可勾选资源声明，同时段配额事务内校验（BR12），取消自动释放。运营：提醒、备份轮转、归档、聚合概览/冲突检测/信用概览（v1.17.0）、--demo-days。</a:t>
             </a:r>
           </a:p>
         </p:txBody>

--- a/docs/thesis/答辩演示.pptx
+++ b/docs/thesis/答辩演示.pptx
@@ -3355,7 +3355,7 @@
               </a:defRPr>
             </a:pPr>
             <a:r>
-              <a:t>▪ 模糊 240 次恶意输入零崩溃；浸泡 51,140 请求零错误</a:t>
+              <a:t>▪ 模糊 720 次恶意输入零崩溃；浸泡 30,892 请求零错误</a:t>
             </a:r>
           </a:p>
           <a:p>
@@ -3829,7 +3829,7 @@
               </a:defRPr>
             </a:pPr>
             <a:r>
-              <a:t>▪ 模糊实验 240 次恶意输入：零崩溃、零 5xx</a:t>
+              <a:t>▪ 模糊实验 720 次恶意输入：零崩溃、零 5xx</a:t>
             </a:r>
           </a:p>
           <a:p>
@@ -3844,7 +3844,7 @@
               </a:defRPr>
             </a:pPr>
             <a:r>
-              <a:t>▪ 浸泡 51,140 请求：工作集 +3MB、句柄 +44，浸泡窗口内未观察到持续增长</a:t>
+              <a:t>▪ 浸泡 30,892 请求：工作集 +2.8MB、句柄 +38，浸泡窗口内未观察到持续增长</a:t>
             </a:r>
           </a:p>
           <a:p>
